--- a/cursos/recursos/desequilibrios-de-material/03-alfil-contra-caballo-el-alfil-que-domina.pptx
+++ b/cursos/recursos/desequilibrios-de-material/03-alfil-contra-caballo-el-alfil-que-domina.pptx
@@ -8957,7 +8957,7 @@
                 </a:solidFill>
                 <a:latin typeface="Calibri"/>
               </a:rPr>
-              <a:t>Analizá la posición tras 37.Ke4 de Guseinov–Ni Hua y proponé tu propio plan de defensa con el caballo antes de ver la continuación real; compará después con el motor cuánto valía objetivamente la posición y cuán difícil era encontrar la defensa correcta. Jugá también la carrera de peones de Jobava–Carlsen contra el motor tomando el bando del caballo, para sentir en la práctica la velocidad del alfil.</a:t>
+              <a:t>Analizá la posición tras 37.Re4 de Guseinov–Ni Hua y proponé tu propio plan de defensa con el caballo antes de ver la continuación real; compará después con el motor cuánto valía objetivamente la posición y cuán difícil era encontrar la defensa correcta. Jugá también la carrera de peones de Jobava–Carlsen contra el motor tomando el bando del caballo, para sentir en la práctica la velocidad del alfil.</a:t>
             </a:r>
           </a:p>
           <a:p>
@@ -9489,7 +9489,7 @@
                 </a:solidFill>
                 <a:latin typeface="Calibri"/>
               </a:rPr>
-              <a:t>El error más frecuente del bando con el caballo es defender de manera puramente pasiva cuando la posición todavía admite una defensa activa (o viceversa): elegir mal entre esos dos enfoques suele ser la diferencia entre sostener el punto y perder por la mínima. Guseinov–Ni Hua ilustra esto de manera espectacular: tras 37.Ke4 la posición parecía completamente ganada para las blancas, pero la apertura del juego y la capacidad del alfil negro para defender a distancia le dieron a Ni Hua excelentes chances de tablas, que finalmente se perdieron recién en la jugada 50 tras un error decisivo del caballo.</a:t>
+              <a:t>El error más frecuente del bando con el caballo es defender de manera puramente pasiva cuando la posición todavía admite una defensa activa (o viceversa): elegir mal entre esos dos enfoques suele ser la diferencia entre sostener el punto y perder por la mínima. Guseinov–Ni Hua ilustra esto de manera espectacular: tras 37.Re4 la posición parecía completamente ganada para las blancas, pero la apertura del juego y la capacidad del alfil negro para defender a distancia le dieron a Ni Hua excelentes chances de tablas, que finalmente se perdieron recién en la jugada 50 tras un error decisivo del caballo.</a:t>
             </a:r>
           </a:p>
         </p:txBody>
@@ -9632,7 +9632,7 @@
                 </a:solidFill>
                 <a:latin typeface="Calibri"/>
               </a:rPr>
-              <a:t>Grachev–Kryvoruchko muestra el mismo fenómeno desde otro ángulo: una posición que la mayoría de los motores calificaría como tablas muertas en cuanto se alcanza el final se convierte, en la práctica, en un auténtico campo minado para el bando del caballo, donde una jugada aparentemente razonable (45.Nh5 en vez de la variante activa) marcaba la diferencia entre sostener y perder. Jobava–Carlsen, jugada a ritmo de blitz, resume el principio en su forma más pura: en una carrera de peones franca, la velocidad del alfil resultó decisiva.</a:t>
+              <a:t>Grachev–Kryvoruchko muestra el mismo fenómeno desde otro ángulo: una posición que la mayoría de los motores calificaría como tablas muertas en cuanto se alcanza el final se convierte, en la práctica, en un auténtico campo minado para el bando del caballo, donde una jugada aparentemente razonable (45.Ch5 en vez de la variante activa) marcaba la diferencia entre sostener y perder. Jobava–Carlsen, jugada a ritmo de blitz, resume el principio en su forma más pura: en una carrera de peones franca, la velocidad del alfil resultó decisiva.</a:t>
             </a:r>
           </a:p>
         </p:txBody>

--- a/cursos/recursos/desequilibrios-de-material/03-alfil-contra-caballo-el-alfil-que-domina.pptx
+++ b/cursos/recursos/desequilibrios-de-material/03-alfil-contra-caballo-el-alfil-que-domina.pptx
@@ -4272,7 +4272,7 @@
                 </a:solidFill>
                 <a:latin typeface="Calibri"/>
               </a:rPr>
-              <a:t>Pista: Llevá el rey a una casilla donde domine al caballo y deje a las blancas con la obligación de mover.</a:t>
+              <a:t>Pista: Lleva el rey a una casilla donde domine al caballo y deje a las blancas con la obligación de mover.</a:t>
             </a:r>
           </a:p>
         </p:txBody>
@@ -4595,7 +4595,7 @@
                 </a:solidFill>
                 <a:latin typeface="Calibri"/>
               </a:rPr>
-              <a:t>Pista: Convertí una debilidad propia (el peón b3) en una jugada que restrinja al rival, en vez de esperar pasivamente.</a:t>
+              <a:t>Pista: Convierte una debilidad propia (el peón b3) en una jugada que restrinja al rival, en vez de esperar pasivamente.</a:t>
             </a:r>
           </a:p>
         </p:txBody>
@@ -5155,7 +5155,7 @@
                 </a:solidFill>
                 <a:latin typeface="Calibri"/>
               </a:rPr>
-              <a:t>•  Elegí siempre la jugada que elimina una debilidad concreta del rival (como capturar un peón débil) antes que una jugada 'de mantenimiento' que no cambia nada real.</a:t>
+              <a:t>•  Elige siempre la jugada que elimina una debilidad concreta del rival (como capturar un peón débil) antes que una jugada 'de mantenimiento' que no cambia nada real.</a:t>
             </a:r>
           </a:p>
           <a:p>
@@ -6594,7 +6594,7 @@
                 </a:solidFill>
                 <a:latin typeface="Calibri"/>
               </a:rPr>
-              <a:t>Pista: No ataques el peón b todavía: primero controlá la casilla por la que ese peón necesita pasar.</a:t>
+              <a:t>Pista: No ataques el peón b todavía: primero controla la casilla por la que ese peón necesita pasar.</a:t>
             </a:r>
           </a:p>
         </p:txBody>
@@ -6917,7 +6917,7 @@
                 </a:solidFill>
                 <a:latin typeface="Calibri"/>
               </a:rPr>
-              <a:t>Pista: Distraé al peón f2 con un avance de distracción.</a:t>
+              <a:t>Pista: Distrae al peón f2 con un avance de distracción.</a:t>
             </a:r>
           </a:p>
         </p:txBody>
@@ -8095,7 +8095,7 @@
                 </a:solidFill>
                 <a:latin typeface="Calibri"/>
               </a:rPr>
-              <a:t>Pista: Empujá el peón un paso más, aunque parezca que se entrega.</a:t>
+              <a:t>Pista: Empuja el peón un paso más, aunque parezca que se entrega.</a:t>
             </a:r>
           </a:p>
         </p:txBody>
@@ -8418,7 +8418,7 @@
                 </a:solidFill>
                 <a:latin typeface="Calibri"/>
               </a:rPr>
-              <a:t>Pista: Controlá la casilla de coronación del peón h desde una diagonal que el rey blanco no pueda tapar.</a:t>
+              <a:t>Pista: Controla la casilla de coronación del peón h desde una diagonal que el rey blanco no pueda tapar.</a:t>
             </a:r>
           </a:p>
         </p:txBody>
@@ -8639,7 +8639,7 @@
                 </a:solidFill>
                 <a:latin typeface="Calibri"/>
               </a:rPr>
-              <a:t>•  El alfil puede cambiar de foco entre los dos flancos sin perder tiempo: aprovechá esa flexibilidad cuando el rival tenga debilidades en ambas alas.</a:t>
+              <a:t>•  El alfil puede cambiar de foco entre los dos flancos sin perder tiempo: aprovecha esa flexibilidad cuando el rival tenga debilidades en ambas alas.</a:t>
             </a:r>
           </a:p>
           <a:p>
@@ -8671,7 +8671,7 @@
                 </a:solidFill>
                 <a:latin typeface="Calibri"/>
               </a:rPr>
-              <a:t>•  En finales de caballo contra alfil, no temas entregar un peón si a cambio abrís líneas decisivas para tu pieza más flexible.</a:t>
+              <a:t>•  En finales de caballo contra alfil, no temas entregar un peón si a cambio abres líneas decisivas para tu pieza más flexible.</a:t>
             </a:r>
           </a:p>
         </p:txBody>
@@ -8957,7 +8957,7 @@
                 </a:solidFill>
                 <a:latin typeface="Calibri"/>
               </a:rPr>
-              <a:t>Analizá la posición tras 37.Re4 de Guseinov–Ni Hua y proponé tu propio plan de defensa con el caballo antes de ver la continuación real; compará después con el motor cuánto valía objetivamente la posición y cuán difícil era encontrar la defensa correcta. Jugá también la carrera de peones de Jobava–Carlsen contra el motor tomando el bando del caballo, para sentir en la práctica la velocidad del alfil.</a:t>
+              <a:t>Analiza la posición tras 37.Re4 de Guseinov–Ni Hua y propón tu propio plan de defensa con el caballo antes de ver la continuación real; compará después con el motor cuánto valía objetivamente la posición y cuán difícil era encontrar la defensa correcta. Juega también la carrera de peones de Jobava–Carlsen contra el motor tomando el bando del caballo, para sentir en la práctica la velocidad del alfil.</a:t>
             </a:r>
           </a:p>
           <a:p>
@@ -8989,7 +8989,7 @@
                 </a:solidFill>
                 <a:latin typeface="Calibri"/>
               </a:rPr>
-              <a:t>En la página del curso podés recorrer cada partida con los comentarios, adivinar las jugadas clave en el tablero y continuar cualquier posición contra el motor (Stockfish). La hoja de ejercicios en PDF reúne los momentos clave de esta lección para resolver sin tablero.</a:t>
+              <a:t>En la página del curso puedes recorrer cada partida con los comentarios, adivinar las jugadas clave en el tablero y continuar cualquier posición contra el motor (Stockfish). La hoja de ejercicios en PDF reúne los momentos clave de esta lección para resolver sin tablero.</a:t>
             </a:r>
           </a:p>
         </p:txBody>
@@ -9028,7 +9028,7 @@
                 </a:solidFill>
                 <a:latin typeface="Calibri"/>
               </a:rPr>
-              <a:t>•  Primero recorré la partida completa leyendo los comentarios.</a:t>
+              <a:t>•  Primero recorre la partida completa leyendo los comentarios.</a:t>
             </a:r>
           </a:p>
           <a:p>
@@ -9044,7 +9044,7 @@
                 </a:solidFill>
                 <a:latin typeface="Calibri"/>
               </a:rPr>
-              <a:t>•  Después hacé el modo "adivinar las jugadas clave" hasta acertar todas.</a:t>
+              <a:t>•  Después haz el modo "adivinar las jugadas clave" hasta acertar todas.</a:t>
             </a:r>
           </a:p>
           <a:p>
@@ -9060,7 +9060,7 @@
                 </a:solidFill>
                 <a:latin typeface="Calibri"/>
               </a:rPr>
-              <a:t>•  Por último respondé el cuestionario y anotá con tus palabras las reglas de la lección.</a:t>
+              <a:t>•  Por último responde el cuestionario y anota con tus palabras las reglas de la lección.</a:t>
             </a:r>
           </a:p>
         </p:txBody>
@@ -9775,7 +9775,7 @@
                 </a:solidFill>
                 <a:latin typeface="Calibri"/>
               </a:rPr>
-              <a:t>•  En posiciones abiertas o con juego en los dos flancos, preferí tener el alfil antes que el caballo.</a:t>
+              <a:t>•  En posiciones abiertas o con juego en los dos flancos, prefiere tener el alfil antes que el caballo.</a:t>
             </a:r>
           </a:p>
           <a:p>
@@ -9823,7 +9823,7 @@
                 </a:solidFill>
                 <a:latin typeface="Calibri"/>
               </a:rPr>
-              <a:t>•  Si jugás con el caballo, buscá cerrar el juego o fijarlo a un flanco antes de que el rival abra la partida.</a:t>
+              <a:t>•  Si juegas con el caballo, busca cerrar el juego o fijarlo a un flanco antes de que el rival abra la partida.</a:t>
             </a:r>
           </a:p>
           <a:p>
@@ -9839,7 +9839,7 @@
                 </a:solidFill>
                 <a:latin typeface="Calibri"/>
               </a:rPr>
-              <a:t>•  Elegí bien entre defensa activa y pasiva con el caballo: confundir el enfoque correcto suele costar la partida.</a:t>
+              <a:t>•  Elige bien entre defensa activa y pasiva con el caballo: confundir el enfoque correcto suele costar la partida.</a:t>
             </a:r>
           </a:p>
         </p:txBody>

--- a/cursos/recursos/desequilibrios-de-material/03-alfil-contra-caballo-el-alfil-que-domina.pptx
+++ b/cursos/recursos/desequilibrios-de-material/03-alfil-contra-caballo-el-alfil-que-domina.pptx
@@ -4272,7 +4272,7 @@
                 </a:solidFill>
                 <a:latin typeface="Calibri"/>
               </a:rPr>
-              <a:t>Pista: Llevá el rey a una casilla donde domine al caballo y deje a las blancas con la obligación de mover.</a:t>
+              <a:t>Pista: Lleva el rey a una casilla donde domine al caballo y deje a las blancas con la obligación de mover.</a:t>
             </a:r>
           </a:p>
         </p:txBody>
@@ -4595,7 +4595,7 @@
                 </a:solidFill>
                 <a:latin typeface="Calibri"/>
               </a:rPr>
-              <a:t>Pista: Convertí una debilidad propia (el peón b3) en una jugada que restrinja al rival, en vez de esperar pasivamente.</a:t>
+              <a:t>Pista: Convierte una debilidad propia (el peón b3) en una jugada que restrinja al rival, en vez de esperar pasivamente.</a:t>
             </a:r>
           </a:p>
         </p:txBody>
@@ -5155,7 +5155,7 @@
                 </a:solidFill>
                 <a:latin typeface="Calibri"/>
               </a:rPr>
-              <a:t>•  Elegí siempre la jugada que elimina una debilidad concreta del rival (como capturar un peón débil) antes que una jugada 'de mantenimiento' que no cambia nada real.</a:t>
+              <a:t>•  Elige siempre la jugada que elimina una debilidad concreta del rival (como capturar un peón débil) antes que una jugada 'de mantenimiento' que no cambia nada real.</a:t>
             </a:r>
           </a:p>
           <a:p>
@@ -6594,7 +6594,7 @@
                 </a:solidFill>
                 <a:latin typeface="Calibri"/>
               </a:rPr>
-              <a:t>Pista: No ataques el peón b todavía: primero controlá la casilla por la que ese peón necesita pasar.</a:t>
+              <a:t>Pista: No ataques el peón b todavía: primero controla la casilla por la que ese peón necesita pasar.</a:t>
             </a:r>
           </a:p>
         </p:txBody>
@@ -6917,7 +6917,7 @@
                 </a:solidFill>
                 <a:latin typeface="Calibri"/>
               </a:rPr>
-              <a:t>Pista: Distraé al peón f2 con un avance de distracción.</a:t>
+              <a:t>Pista: Distrae al peón f2 con un avance de distracción.</a:t>
             </a:r>
           </a:p>
         </p:txBody>
@@ -8095,7 +8095,7 @@
                 </a:solidFill>
                 <a:latin typeface="Calibri"/>
               </a:rPr>
-              <a:t>Pista: Empujá el peón un paso más, aunque parezca que se entrega.</a:t>
+              <a:t>Pista: Empuja el peón un paso más, aunque parezca que se entrega.</a:t>
             </a:r>
           </a:p>
         </p:txBody>
@@ -8418,7 +8418,7 @@
                 </a:solidFill>
                 <a:latin typeface="Calibri"/>
               </a:rPr>
-              <a:t>Pista: Controlá la casilla de coronación del peón h desde una diagonal que el rey blanco no pueda tapar.</a:t>
+              <a:t>Pista: Controla la casilla de coronación del peón h desde una diagonal que el rey blanco no pueda tapar.</a:t>
             </a:r>
           </a:p>
         </p:txBody>
@@ -8639,7 +8639,7 @@
                 </a:solidFill>
                 <a:latin typeface="Calibri"/>
               </a:rPr>
-              <a:t>•  El alfil puede cambiar de foco entre los dos flancos sin perder tiempo: aprovechá esa flexibilidad cuando el rival tenga debilidades en ambas alas.</a:t>
+              <a:t>•  El alfil puede cambiar de foco entre los dos flancos sin perder tiempo: aprovecha esa flexibilidad cuando el rival tenga debilidades en ambas alas.</a:t>
             </a:r>
           </a:p>
           <a:p>
@@ -8671,7 +8671,7 @@
                 </a:solidFill>
                 <a:latin typeface="Calibri"/>
               </a:rPr>
-              <a:t>•  En finales de caballo contra alfil, no temas entregar un peón si a cambio abrís líneas decisivas para tu pieza más flexible.</a:t>
+              <a:t>•  En finales de caballo contra alfil, no temas entregar un peón si a cambio abres líneas decisivas para tu pieza más flexible.</a:t>
             </a:r>
           </a:p>
         </p:txBody>
@@ -8957,7 +8957,7 @@
                 </a:solidFill>
                 <a:latin typeface="Calibri"/>
               </a:rPr>
-              <a:t>Analizá la posición tras 37.Ke4 de Guseinov–Ni Hua y proponé tu propio plan de defensa con el caballo antes de ver la continuación real; compará después con el motor cuánto valía objetivamente la posición y cuán difícil era encontrar la defensa correcta. Jugá también la carrera de peones de Jobava–Carlsen contra el motor tomando el bando del caballo, para sentir en la práctica la velocidad del alfil.</a:t>
+              <a:t>Analiza la posición tras 37.Re4 de Guseinov–Ni Hua y propón tu propio plan de defensa con el caballo antes de ver la continuación real; compará después con el motor cuánto valía objetivamente la posición y cuán difícil era encontrar la defensa correcta. Juega también la carrera de peones de Jobava–Carlsen contra el motor tomando el bando del caballo, para sentir en la práctica la velocidad del alfil.</a:t>
             </a:r>
           </a:p>
           <a:p>
@@ -8989,7 +8989,7 @@
                 </a:solidFill>
                 <a:latin typeface="Calibri"/>
               </a:rPr>
-              <a:t>En la página del curso podés recorrer cada partida con los comentarios, adivinar las jugadas clave en el tablero y continuar cualquier posición contra el motor (Stockfish). La hoja de ejercicios en PDF reúne los momentos clave de esta lección para resolver sin tablero.</a:t>
+              <a:t>En la página del curso puedes recorrer cada partida con los comentarios, adivinar las jugadas clave en el tablero y continuar cualquier posición contra el motor (Stockfish). La hoja de ejercicios en PDF reúne los momentos clave de esta lección para resolver sin tablero.</a:t>
             </a:r>
           </a:p>
         </p:txBody>
@@ -9028,7 +9028,7 @@
                 </a:solidFill>
                 <a:latin typeface="Calibri"/>
               </a:rPr>
-              <a:t>•  Primero recorré la partida completa leyendo los comentarios.</a:t>
+              <a:t>•  Primero recorre la partida completa leyendo los comentarios.</a:t>
             </a:r>
           </a:p>
           <a:p>
@@ -9044,7 +9044,7 @@
                 </a:solidFill>
                 <a:latin typeface="Calibri"/>
               </a:rPr>
-              <a:t>•  Después hacé el modo "adivinar las jugadas clave" hasta acertar todas.</a:t>
+              <a:t>•  Después haz el modo "adivinar las jugadas clave" hasta acertar todas.</a:t>
             </a:r>
           </a:p>
           <a:p>
@@ -9060,7 +9060,7 @@
                 </a:solidFill>
                 <a:latin typeface="Calibri"/>
               </a:rPr>
-              <a:t>•  Por último respondé el cuestionario y anotá con tus palabras las reglas de la lección.</a:t>
+              <a:t>•  Por último responde el cuestionario y anota con tus palabras las reglas de la lección.</a:t>
             </a:r>
           </a:p>
         </p:txBody>
@@ -9489,7 +9489,7 @@
                 </a:solidFill>
                 <a:latin typeface="Calibri"/>
               </a:rPr>
-              <a:t>El error más frecuente del bando con el caballo es defender de manera puramente pasiva cuando la posición todavía admite una defensa activa (o viceversa): elegir mal entre esos dos enfoques suele ser la diferencia entre sostener el punto y perder por la mínima. Guseinov–Ni Hua ilustra esto de manera espectacular: tras 37.Ke4 la posición parecía completamente ganada para las blancas, pero la apertura del juego y la capacidad del alfil negro para defender a distancia le dieron a Ni Hua excelentes chances de tablas, que finalmente se perdieron recién en la jugada 50 tras un error decisivo del caballo.</a:t>
+              <a:t>El error más frecuente del bando con el caballo es defender de manera puramente pasiva cuando la posición todavía admite una defensa activa (o viceversa): elegir mal entre esos dos enfoques suele ser la diferencia entre sostener el punto y perder por la mínima. Guseinov–Ni Hua ilustra esto de manera espectacular: tras 37.Re4 la posición parecía completamente ganada para las blancas, pero la apertura del juego y la capacidad del alfil negro para defender a distancia le dieron a Ni Hua excelentes chances de tablas, que finalmente se perdieron recién en la jugada 50 tras un error decisivo del caballo.</a:t>
             </a:r>
           </a:p>
         </p:txBody>
@@ -9632,7 +9632,7 @@
                 </a:solidFill>
                 <a:latin typeface="Calibri"/>
               </a:rPr>
-              <a:t>Grachev–Kryvoruchko muestra el mismo fenómeno desde otro ángulo: una posición que la mayoría de los motores calificaría como tablas muertas en cuanto se alcanza el final se convierte, en la práctica, en un auténtico campo minado para el bando del caballo, donde una jugada aparentemente razonable (45.Nh5 en vez de la variante activa) marcaba la diferencia entre sostener y perder. Jobava–Carlsen, jugada a ritmo de blitz, resume el principio en su forma más pura: en una carrera de peones franca, la velocidad del alfil resultó decisiva.</a:t>
+              <a:t>Grachev–Kryvoruchko muestra el mismo fenómeno desde otro ángulo: una posición que la mayoría de los motores calificaría como tablas muertas en cuanto se alcanza el final se convierte, en la práctica, en un auténtico campo minado para el bando del caballo, donde una jugada aparentemente razonable (45.Ch5 en vez de la variante activa) marcaba la diferencia entre sostener y perder. Jobava–Carlsen, jugada a ritmo de blitz, resume el principio en su forma más pura: en una carrera de peones franca, la velocidad del alfil resultó decisiva.</a:t>
             </a:r>
           </a:p>
         </p:txBody>
@@ -9775,7 +9775,7 @@
                 </a:solidFill>
                 <a:latin typeface="Calibri"/>
               </a:rPr>
-              <a:t>•  En posiciones abiertas o con juego en los dos flancos, preferí tener el alfil antes que el caballo.</a:t>
+              <a:t>•  En posiciones abiertas o con juego en los dos flancos, prefiere tener el alfil antes que el caballo.</a:t>
             </a:r>
           </a:p>
           <a:p>
@@ -9823,7 +9823,7 @@
                 </a:solidFill>
                 <a:latin typeface="Calibri"/>
               </a:rPr>
-              <a:t>•  Si jugás con el caballo, buscá cerrar el juego o fijarlo a un flanco antes de que el rival abra la partida.</a:t>
+              <a:t>•  Si juegas con el caballo, busca cerrar el juego o fijarlo a un flanco antes de que el rival abra la partida.</a:t>
             </a:r>
           </a:p>
           <a:p>
@@ -9839,7 +9839,7 @@
                 </a:solidFill>
                 <a:latin typeface="Calibri"/>
               </a:rPr>
-              <a:t>•  Elegí bien entre defensa activa y pasiva con el caballo: confundir el enfoque correcto suele costar la partida.</a:t>
+              <a:t>•  Elige bien entre defensa activa y pasiva con el caballo: confundir el enfoque correcto suele costar la partida.</a:t>
             </a:r>
           </a:p>
         </p:txBody>
